--- a/chapter11/parts/part-04-active-learning-applications/clip.pptx
+++ b/chapter11/parts/part-04-active-learning-applications/clip.pptx
@@ -4397,10 +4397,12 @@
           </a:bodyPr>
           <a:lstStyle/>
           <a:p>
-            <a:pPr>
+            <a:pPr lvl="0" marL="457200" indent="-228600">
+              <a:buFont typeface="Calibri"/>
               <a:spcAft>
                 <a:spcPts val="1000"/>
               </a:spcAft>
+              <a:buSzPct val="100000"/>
               <a:buChar char="•"/>
               <a:lnSpc>
                 <a:spcPts val="2200"/>
@@ -4417,10 +4419,12 @@
             </a:r>
           </a:p>
           <a:p>
-            <a:pPr>
+            <a:pPr lvl="0" marL="457200" indent="-228600">
+              <a:buFont typeface="Calibri"/>
               <a:spcAft>
                 <a:spcPts val="1000"/>
               </a:spcAft>
+              <a:buSzPct val="100000"/>
               <a:buChar char="•"/>
               <a:lnSpc>
                 <a:spcPts val="2200"/>
@@ -4437,10 +4441,12 @@
             </a:r>
           </a:p>
           <a:p>
-            <a:pPr>
+            <a:pPr lvl="0" marL="457200" indent="-228600">
+              <a:buFont typeface="Calibri"/>
               <a:spcAft>
                 <a:spcPts val="1000"/>
               </a:spcAft>
+              <a:buSzPct val="100000"/>
               <a:buChar char="•"/>
               <a:lnSpc>
                 <a:spcPts val="2200"/>
@@ -4576,10 +4582,12 @@
           </a:bodyPr>
           <a:lstStyle/>
           <a:p>
-            <a:pPr>
+            <a:pPr lvl="0" marL="457200" indent="-228600">
+              <a:buFont typeface="Calibri"/>
               <a:spcAft>
                 <a:spcPts val="1000"/>
               </a:spcAft>
+              <a:buSzPct val="100000"/>
               <a:buChar char="•"/>
               <a:lnSpc>
                 <a:spcPts val="2200"/>
@@ -4596,10 +4604,12 @@
             </a:r>
           </a:p>
           <a:p>
-            <a:pPr>
+            <a:pPr lvl="0" marL="457200" indent="-228600">
+              <a:buFont typeface="Calibri"/>
               <a:spcAft>
                 <a:spcPts val="1000"/>
               </a:spcAft>
+              <a:buSzPct val="100000"/>
               <a:buChar char="•"/>
               <a:lnSpc>
                 <a:spcPts val="2200"/>
@@ -4735,10 +4745,12 @@
           </a:bodyPr>
           <a:lstStyle/>
           <a:p>
-            <a:pPr>
+            <a:pPr lvl="0" marL="457200" indent="-228600">
+              <a:buFont typeface="Calibri"/>
               <a:spcAft>
                 <a:spcPts val="1000"/>
               </a:spcAft>
+              <a:buSzPct val="100000"/>
               <a:buChar char="•"/>
               <a:lnSpc>
                 <a:spcPts val="2200"/>
@@ -4874,10 +4886,12 @@
           </a:bodyPr>
           <a:lstStyle/>
           <a:p>
-            <a:pPr>
+            <a:pPr lvl="0" marL="457200" indent="-228600">
+              <a:buFont typeface="Calibri"/>
               <a:spcAft>
                 <a:spcPts val="1000"/>
               </a:spcAft>
+              <a:buSzPct val="100000"/>
               <a:buChar char="•"/>
               <a:lnSpc>
                 <a:spcPts val="2200"/>
@@ -4894,10 +4908,12 @@
             </a:r>
           </a:p>
           <a:p>
-            <a:pPr>
+            <a:pPr lvl="0" marL="457200" indent="-228600">
+              <a:buFont typeface="Calibri"/>
               <a:spcAft>
                 <a:spcPts val="1000"/>
               </a:spcAft>
+              <a:buSzPct val="100000"/>
               <a:buChar char="•"/>
               <a:lnSpc>
                 <a:spcPts val="2200"/>
@@ -4914,10 +4930,12 @@
             </a:r>
           </a:p>
           <a:p>
-            <a:pPr>
+            <a:pPr lvl="0" marL="457200" indent="-228600">
+              <a:buFont typeface="Calibri"/>
               <a:spcAft>
                 <a:spcPts val="1000"/>
               </a:spcAft>
+              <a:buSzPct val="100000"/>
               <a:buChar char="•"/>
               <a:lnSpc>
                 <a:spcPts val="2200"/>
@@ -5053,10 +5071,12 @@
           </a:bodyPr>
           <a:lstStyle/>
           <a:p>
-            <a:pPr>
+            <a:pPr lvl="0" marL="457200" indent="-228600">
+              <a:buFont typeface="Calibri"/>
               <a:spcAft>
                 <a:spcPts val="1000"/>
               </a:spcAft>
+              <a:buSzPct val="100000"/>
               <a:buChar char="•"/>
               <a:lnSpc>
                 <a:spcPts val="2200"/>
@@ -5073,10 +5093,12 @@
             </a:r>
           </a:p>
           <a:p>
-            <a:pPr>
+            <a:pPr lvl="0" marL="457200" indent="-228600">
+              <a:buFont typeface="Calibri"/>
               <a:spcAft>
                 <a:spcPts val="1000"/>
               </a:spcAft>
+              <a:buSzPct val="100000"/>
               <a:buChar char="•"/>
               <a:lnSpc>
                 <a:spcPts val="2200"/>
@@ -5093,10 +5115,12 @@
             </a:r>
           </a:p>
           <a:p>
-            <a:pPr>
+            <a:pPr lvl="0" marL="457200" indent="-228600">
+              <a:buFont typeface="Calibri"/>
               <a:spcAft>
                 <a:spcPts val="1000"/>
               </a:spcAft>
+              <a:buSzPct val="100000"/>
               <a:buChar char="•"/>
               <a:lnSpc>
                 <a:spcPts val="2200"/>
@@ -5113,10 +5137,12 @@
             </a:r>
           </a:p>
           <a:p>
-            <a:pPr>
+            <a:pPr lvl="0" marL="457200" indent="-228600">
+              <a:buFont typeface="Calibri"/>
               <a:spcAft>
                 <a:spcPts val="1000"/>
               </a:spcAft>
+              <a:buSzPct val="100000"/>
               <a:buChar char="•"/>
               <a:lnSpc>
                 <a:spcPts val="2200"/>
@@ -5133,10 +5159,12 @@
             </a:r>
           </a:p>
           <a:p>
-            <a:pPr>
+            <a:pPr lvl="0" marL="457200" indent="-228600">
+              <a:buFont typeface="Calibri"/>
               <a:spcAft>
                 <a:spcPts val="1000"/>
               </a:spcAft>
+              <a:buSzPct val="100000"/>
               <a:buChar char="•"/>
               <a:lnSpc>
                 <a:spcPts val="2200"/>
@@ -5272,10 +5300,12 @@
           </a:bodyPr>
           <a:lstStyle/>
           <a:p>
-            <a:pPr>
+            <a:pPr lvl="0" marL="457200" indent="-228600">
+              <a:buFont typeface="Calibri"/>
               <a:spcAft>
                 <a:spcPts val="1000"/>
               </a:spcAft>
+              <a:buSzPct val="100000"/>
               <a:buChar char="•"/>
               <a:lnSpc>
                 <a:spcPts val="2200"/>
@@ -5292,10 +5322,12 @@
             </a:r>
           </a:p>
           <a:p>
-            <a:pPr>
+            <a:pPr lvl="0" marL="457200" indent="-228600">
+              <a:buFont typeface="Calibri"/>
               <a:spcAft>
                 <a:spcPts val="1000"/>
               </a:spcAft>
+              <a:buSzPct val="100000"/>
               <a:buChar char="•"/>
               <a:lnSpc>
                 <a:spcPts val="2200"/>
@@ -5431,10 +5463,12 @@
           </a:bodyPr>
           <a:lstStyle/>
           <a:p>
-            <a:pPr>
+            <a:pPr lvl="0" marL="457200" indent="-228600">
+              <a:buFont typeface="Calibri"/>
               <a:spcAft>
                 <a:spcPts val="1000"/>
               </a:spcAft>
+              <a:buSzPct val="100000"/>
               <a:buChar char="•"/>
               <a:lnSpc>
                 <a:spcPts val="2200"/>
@@ -5451,10 +5485,12 @@
             </a:r>
           </a:p>
           <a:p>
-            <a:pPr>
+            <a:pPr lvl="0" marL="457200" indent="-228600">
+              <a:buFont typeface="Calibri"/>
               <a:spcAft>
                 <a:spcPts val="1000"/>
               </a:spcAft>
+              <a:buSzPct val="100000"/>
               <a:buChar char="•"/>
               <a:lnSpc>
                 <a:spcPts val="2200"/>
@@ -5471,10 +5507,12 @@
             </a:r>
           </a:p>
           <a:p>
-            <a:pPr>
+            <a:pPr lvl="0" marL="457200" indent="-228600">
+              <a:buFont typeface="Calibri"/>
               <a:spcAft>
                 <a:spcPts val="1000"/>
               </a:spcAft>
+              <a:buSzPct val="100000"/>
               <a:buChar char="•"/>
               <a:lnSpc>
                 <a:spcPts val="2200"/>
@@ -5491,10 +5529,12 @@
             </a:r>
           </a:p>
           <a:p>
-            <a:pPr>
+            <a:pPr lvl="0" marL="457200" indent="-228600">
+              <a:buFont typeface="Calibri"/>
               <a:spcAft>
                 <a:spcPts val="1000"/>
               </a:spcAft>
+              <a:buSzPct val="100000"/>
               <a:buChar char="•"/>
               <a:lnSpc>
                 <a:spcPts val="2200"/>
@@ -5511,10 +5551,12 @@
             </a:r>
           </a:p>
           <a:p>
-            <a:pPr>
+            <a:pPr lvl="0" marL="457200" indent="-228600">
+              <a:buFont typeface="Calibri"/>
               <a:spcAft>
                 <a:spcPts val="1000"/>
               </a:spcAft>
+              <a:buSzPct val="100000"/>
               <a:buChar char="•"/>
               <a:lnSpc>
                 <a:spcPts val="2200"/>
@@ -5650,10 +5692,12 @@
           </a:bodyPr>
           <a:lstStyle/>
           <a:p>
-            <a:pPr>
+            <a:pPr lvl="0" marL="457200" indent="-228600">
+              <a:buFont typeface="Calibri"/>
               <a:spcAft>
                 <a:spcPts val="1000"/>
               </a:spcAft>
+              <a:buSzPct val="100000"/>
               <a:buChar char="•"/>
               <a:lnSpc>
                 <a:spcPts val="2200"/>
@@ -5670,10 +5714,12 @@
             </a:r>
           </a:p>
           <a:p>
-            <a:pPr>
+            <a:pPr lvl="0" marL="457200" indent="-228600">
+              <a:buFont typeface="Calibri"/>
               <a:spcAft>
                 <a:spcPts val="1000"/>
               </a:spcAft>
+              <a:buSzPct val="100000"/>
               <a:buChar char="•"/>
               <a:lnSpc>
                 <a:spcPts val="2200"/>
@@ -5690,10 +5736,12 @@
             </a:r>
           </a:p>
           <a:p>
-            <a:pPr>
+            <a:pPr lvl="0" marL="457200" indent="-228600">
+              <a:buFont typeface="Calibri"/>
               <a:spcAft>
                 <a:spcPts val="1000"/>
               </a:spcAft>
+              <a:buSzPct val="100000"/>
               <a:buChar char="•"/>
               <a:lnSpc>
                 <a:spcPts val="2200"/>
@@ -5829,10 +5877,12 @@
           </a:bodyPr>
           <a:lstStyle/>
           <a:p>
-            <a:pPr>
+            <a:pPr lvl="0" marL="457200" indent="-228600">
+              <a:buFont typeface="Calibri"/>
               <a:spcAft>
                 <a:spcPts val="1000"/>
               </a:spcAft>
+              <a:buSzPct val="100000"/>
               <a:buChar char="•"/>
               <a:lnSpc>
                 <a:spcPts val="2200"/>
@@ -5849,10 +5899,12 @@
             </a:r>
           </a:p>
           <a:p>
-            <a:pPr>
+            <a:pPr lvl="0" marL="457200" indent="-228600">
+              <a:buFont typeface="Calibri"/>
               <a:spcAft>
                 <a:spcPts val="1000"/>
               </a:spcAft>
+              <a:buSzPct val="100000"/>
               <a:buChar char="•"/>
               <a:lnSpc>
                 <a:spcPts val="2200"/>
@@ -5869,10 +5921,12 @@
             </a:r>
           </a:p>
           <a:p>
-            <a:pPr>
+            <a:pPr lvl="0" marL="457200" indent="-228600">
+              <a:buFont typeface="Calibri"/>
               <a:spcAft>
                 <a:spcPts val="1000"/>
               </a:spcAft>
+              <a:buSzPct val="100000"/>
               <a:buChar char="•"/>
               <a:lnSpc>
                 <a:spcPts val="2200"/>
@@ -5889,10 +5943,12 @@
             </a:r>
           </a:p>
           <a:p>
-            <a:pPr>
+            <a:pPr lvl="0" marL="457200" indent="-228600">
+              <a:buFont typeface="Calibri"/>
               <a:spcAft>
                 <a:spcPts val="1000"/>
               </a:spcAft>
+              <a:buSzPct val="100000"/>
               <a:buChar char="•"/>
               <a:lnSpc>
                 <a:spcPts val="2200"/>
@@ -5909,10 +5965,12 @@
             </a:r>
           </a:p>
           <a:p>
-            <a:pPr>
+            <a:pPr lvl="0" marL="457200" indent="-228600">
+              <a:buFont typeface="Calibri"/>
               <a:spcAft>
                 <a:spcPts val="1000"/>
               </a:spcAft>
+              <a:buSzPct val="100000"/>
               <a:buChar char="•"/>
               <a:lnSpc>
                 <a:spcPts val="2200"/>
@@ -6048,10 +6106,12 @@
           </a:bodyPr>
           <a:lstStyle/>
           <a:p>
-            <a:pPr>
+            <a:pPr lvl="0" marL="457200" indent="-228600">
+              <a:buFont typeface="Calibri"/>
               <a:spcAft>
                 <a:spcPts val="1000"/>
               </a:spcAft>
+              <a:buSzPct val="100000"/>
               <a:buChar char="•"/>
               <a:lnSpc>
                 <a:spcPts val="2200"/>
@@ -6068,10 +6128,12 @@
             </a:r>
           </a:p>
           <a:p>
-            <a:pPr>
+            <a:pPr lvl="0" marL="457200" indent="-228600">
+              <a:buFont typeface="Calibri"/>
               <a:spcAft>
                 <a:spcPts val="1000"/>
               </a:spcAft>
+              <a:buSzPct val="100000"/>
               <a:buChar char="•"/>
               <a:lnSpc>
                 <a:spcPts val="2200"/>
@@ -6088,10 +6150,12 @@
             </a:r>
           </a:p>
           <a:p>
-            <a:pPr>
+            <a:pPr lvl="0" marL="457200" indent="-228600">
+              <a:buFont typeface="Calibri"/>
               <a:spcAft>
                 <a:spcPts val="1000"/>
               </a:spcAft>
+              <a:buSzPct val="100000"/>
               <a:buChar char="•"/>
               <a:lnSpc>
                 <a:spcPts val="2200"/>
@@ -6108,10 +6172,12 @@
             </a:r>
           </a:p>
           <a:p>
-            <a:pPr>
+            <a:pPr lvl="0" marL="457200" indent="-228600">
+              <a:buFont typeface="Calibri"/>
               <a:spcAft>
                 <a:spcPts val="1000"/>
               </a:spcAft>
+              <a:buSzPct val="100000"/>
               <a:buChar char="•"/>
               <a:lnSpc>
                 <a:spcPts val="2200"/>
@@ -6128,10 +6194,12 @@
             </a:r>
           </a:p>
           <a:p>
-            <a:pPr>
+            <a:pPr lvl="0" marL="457200" indent="-228600">
+              <a:buFont typeface="Calibri"/>
               <a:spcAft>
                 <a:spcPts val="1000"/>
               </a:spcAft>
+              <a:buSzPct val="100000"/>
               <a:buChar char="•"/>
               <a:lnSpc>
                 <a:spcPts val="2200"/>
